--- a/4_Preparacion_del_pitch/Presentacion_extendida_respaldo.pptx
+++ b/4_Preparacion_del_pitch/Presentacion_extendida_respaldo.pptx
@@ -120,23 +120,23 @@
   <p:extLst>
     <p:ext uri="{521415D9-36F7-43E2-AB2F-B90AF26B5E84}">
       <p14:sectionLst xmlns:p14="http://schemas.microsoft.com/office/powerpoint/2010/main">
-        <p14:section name="Apertura" id="{a8405294-51c1-6369-e4c0-c8c06dbf9909}">
+        <p14:section name="Apertura" id="{c08df8de-dc14-2937-ca99-c29da9bcc9a8}">
           <p14:sldIdLst>
             <p14:sldId id="256"/>
           </p14:sldIdLst>
         </p14:section>
-        <p14:section name="Problema" id="{0bf436b1-76ff-689f-7503-f0d2f5e4f44a}">
+        <p14:section name="Problema" id="{c1438d30-794b-6003-fbd2-a68a7605933a}">
           <p14:sldIdLst>
             <p14:sldId id="257"/>
             <p14:sldId id="258"/>
           </p14:sldIdLst>
         </p14:section>
-        <p14:section name="Solución" id="{83d2e311-1fb7-522a-b1a0-abf7658e99d2}">
+        <p14:section name="Solución" id="{16ffdbab-93ae-afd1-9b45-b7e22c44ce51}">
           <p14:sldIdLst>
             <p14:sldId id="259"/>
           </p14:sldIdLst>
         </p14:section>
-        <p14:section name="Demo" id="{368e3400-075a-d544-de1a-2abfa4fea473}">
+        <p14:section name="Demo" id="{866a0a66-ff0d-17d1-8537-64520fa7bb59}">
           <p14:sldIdLst>
             <p14:sldId id="260"/>
             <p14:sldId id="261"/>
@@ -144,19 +144,19 @@
             <p14:sldId id="263"/>
           </p14:sldIdLst>
         </p14:section>
-        <p14:section name="Negocio" id="{4f7bb6cb-38dd-69f5-c963-3071d95bae51}">
+        <p14:section name="Negocio" id="{3a9ef35f-ecf6-3a5f-fd51-941606955b5d}">
           <p14:sldIdLst>
             <p14:sldId id="264"/>
           </p14:sldIdLst>
         </p14:section>
-        <p14:section name="Piloto" id="{960ab5a4-1b3d-5f65-1d9a-8320ecf8d14b}">
+        <p14:section name="Piloto" id="{af853ac6-4cde-c25d-f744-ae4790723354}">
           <p14:sldIdLst>
             <p14:sldId id="265"/>
             <p14:sldId id="266"/>
             <p14:sldId id="267"/>
           </p14:sldIdLst>
         </p14:section>
-        <p14:section name="Cierre" id="{19050f47-992d-71e2-b58d-2d553aa56425}">
+        <p14:section name="Cierre" id="{17ef8372-f265-4e07-e3f7-44beb36d541a}">
           <p14:sldIdLst>
             <p14:sldId id="268"/>
             <p14:sldId id="269"/>
@@ -3359,7 +3359,7 @@
                   <a:srgbClr val="CADCFC"/>
                 </a:solidFill>
               </a:rPr>
-              <a:t>Presenta: [Nombre] · [Área] · Octubre 2026</a:t>
+              <a:t>Presenta: Sandra Jimenez · Asistente de Experiencia B2B · Octubre 2026</a:t>
             </a:r>
             <a:endParaRPr lang="en-US" sz="1500" dirty="0"/>
           </a:p>
@@ -6609,7 +6609,7 @@
                   <a:srgbClr val="FFFFFF"/>
                 </a:solidFill>
               </a:rPr>
-              <a:t>Tigo Predice · [Nombre] · [Correo]</a:t>
+              <a:t>Tigo Predice · Sandra Jimenez · sandra.jimenez@tigo.com.hn</a:t>
             </a:r>
             <a:endParaRPr lang="en-US" sz="1600" dirty="0"/>
           </a:p>

--- a/4_Preparacion_del_pitch/Presentacion_extendida_respaldo.pptx
+++ b/4_Preparacion_del_pitch/Presentacion_extendida_respaldo.pptx
@@ -120,23 +120,23 @@
   <p:extLst>
     <p:ext uri="{521415D9-36F7-43E2-AB2F-B90AF26B5E84}">
       <p14:sectionLst xmlns:p14="http://schemas.microsoft.com/office/powerpoint/2010/main">
-        <p14:section name="Apertura" id="{c08df8de-dc14-2937-ca99-c29da9bcc9a8}">
+        <p14:section name="Apertura" id="{6d394a2c-aa94-8514-18b1-2196d2029533}">
           <p14:sldIdLst>
             <p14:sldId id="256"/>
           </p14:sldIdLst>
         </p14:section>
-        <p14:section name="Problema" id="{c1438d30-794b-6003-fbd2-a68a7605933a}">
+        <p14:section name="Problema" id="{d3181d92-f906-1c08-f59a-b49af3fb184f}">
           <p14:sldIdLst>
             <p14:sldId id="257"/>
             <p14:sldId id="258"/>
           </p14:sldIdLst>
         </p14:section>
-        <p14:section name="Solución" id="{16ffdbab-93ae-afd1-9b45-b7e22c44ce51}">
+        <p14:section name="Solución" id="{82395688-18a8-1717-4636-2506570c8806}">
           <p14:sldIdLst>
             <p14:sldId id="259"/>
           </p14:sldIdLst>
         </p14:section>
-        <p14:section name="Demo" id="{866a0a66-ff0d-17d1-8537-64520fa7bb59}">
+        <p14:section name="Demo" id="{4aace565-df7f-54ee-1d77-27bbdb29485c}">
           <p14:sldIdLst>
             <p14:sldId id="260"/>
             <p14:sldId id="261"/>
@@ -144,19 +144,19 @@
             <p14:sldId id="263"/>
           </p14:sldIdLst>
         </p14:section>
-        <p14:section name="Negocio" id="{3a9ef35f-ecf6-3a5f-fd51-941606955b5d}">
+        <p14:section name="Negocio" id="{755f649b-0c55-d312-7d69-bca6f0f191da}">
           <p14:sldIdLst>
             <p14:sldId id="264"/>
           </p14:sldIdLst>
         </p14:section>
-        <p14:section name="Piloto" id="{af853ac6-4cde-c25d-f744-ae4790723354}">
+        <p14:section name="Piloto" id="{57e7e724-89a9-407f-a65e-3e753bed4081}">
           <p14:sldIdLst>
             <p14:sldId id="265"/>
             <p14:sldId id="266"/>
             <p14:sldId id="267"/>
           </p14:sldIdLst>
         </p14:section>
-        <p14:section name="Cierre" id="{17ef8372-f265-4e07-e3f7-44beb36d541a}">
+        <p14:section name="Cierre" id="{9f36a097-c4a3-4b89-bf4b-814eca8fe97e}">
           <p14:sldIdLst>
             <p14:sldId id="268"/>
             <p14:sldId id="269"/>
@@ -4242,7 +4242,7 @@
                   <a:schemeClr val="tx2"/>
                 </a:solidFill>
               </a:rPr>
-              <a:t>Seguridad y privacidad con la vara de un hiperescalador</a:t>
+              <a:t>Seguridad y privacidad con marcos internacionales</a:t>
             </a:r>
             <a:endParaRPr lang="en-US" sz="3200" dirty="0"/>
           </a:p>
@@ -4410,7 +4410,7 @@
                   <a:schemeClr val="tx1"/>
                 </a:solidFill>
               </a:rPr>
-              <a:t>GDPR como vara (Honduras aún no tiene ley integral), ISO 27001/27701/42001, SOC 2, NIST, OWASP API y LLM.</a:t>
+              <a:t>GDPR como referencia (Honduras aún no tiene ley integral), ISO 27001/27701/42001, SOC 2, NIST, OWASP API y LLM.</a:t>
             </a:r>
             <a:endParaRPr lang="en-US" sz="1700" dirty="0"/>
           </a:p>

--- a/4_Preparacion_del_pitch/Presentacion_extendida_respaldo.pptx
+++ b/4_Preparacion_del_pitch/Presentacion_extendida_respaldo.pptx
@@ -120,23 +120,23 @@
   <p:extLst>
     <p:ext uri="{521415D9-36F7-43E2-AB2F-B90AF26B5E84}">
       <p14:sectionLst xmlns:p14="http://schemas.microsoft.com/office/powerpoint/2010/main">
-        <p14:section name="Apertura" id="{6d394a2c-aa94-8514-18b1-2196d2029533}">
+        <p14:section name="Apertura" id="{1c9b7e3d-12c6-ca82-bbd6-73fc916ea461}">
           <p14:sldIdLst>
             <p14:sldId id="256"/>
           </p14:sldIdLst>
         </p14:section>
-        <p14:section name="Problema" id="{d3181d92-f906-1c08-f59a-b49af3fb184f}">
+        <p14:section name="Problema" id="{345634e2-56f0-2359-aba9-6f6611ca25fd}">
           <p14:sldIdLst>
             <p14:sldId id="257"/>
             <p14:sldId id="258"/>
           </p14:sldIdLst>
         </p14:section>
-        <p14:section name="Solución" id="{82395688-18a8-1717-4636-2506570c8806}">
+        <p14:section name="Solución" id="{fb1c7f53-8e29-d809-5a14-d802314c0a7f}">
           <p14:sldIdLst>
             <p14:sldId id="259"/>
           </p14:sldIdLst>
         </p14:section>
-        <p14:section name="Demo" id="{4aace565-df7f-54ee-1d77-27bbdb29485c}">
+        <p14:section name="Demo" id="{76969146-912e-c4e7-7c1a-d3162adcabe4}">
           <p14:sldIdLst>
             <p14:sldId id="260"/>
             <p14:sldId id="261"/>
@@ -144,19 +144,19 @@
             <p14:sldId id="263"/>
           </p14:sldIdLst>
         </p14:section>
-        <p14:section name="Negocio" id="{755f649b-0c55-d312-7d69-bca6f0f191da}">
+        <p14:section name="Negocio" id="{8f40f7f6-a804-38d6-5f3d-f3c262313244}">
           <p14:sldIdLst>
             <p14:sldId id="264"/>
           </p14:sldIdLst>
         </p14:section>
-        <p14:section name="Piloto" id="{57e7e724-89a9-407f-a65e-3e753bed4081}">
+        <p14:section name="Piloto" id="{a16f162a-a4ef-adf2-54fb-de0ad557bf5d}">
           <p14:sldIdLst>
             <p14:sldId id="265"/>
             <p14:sldId id="266"/>
             <p14:sldId id="267"/>
           </p14:sldIdLst>
         </p14:section>
-        <p14:section name="Cierre" id="{9f36a097-c4a3-4b89-bf4b-814eca8fe97e}">
+        <p14:section name="Cierre" id="{deb80652-84e5-9971-64a5-391529c8baaa}">
           <p14:sldIdLst>
             <p14:sldId id="268"/>
             <p14:sldId id="269"/>
@@ -6672,7 +6672,7 @@
                   <a:schemeClr val="tx2"/>
                 </a:solidFill>
               </a:rPr>
-              <a:t>El módem avisa días antes. Hoy nadie lo escucha</a:t>
+              <a:t>El módem avisa días antes: escuchémoslo a tiempo</a:t>
             </a:r>
             <a:endParaRPr lang="en-US" sz="3200" dirty="0"/>
           </a:p>
